--- a/sample-documents/05-pricing-exception-matrix.pptx
+++ b/sample-documents/05-pricing-exception-matrix.pptx
@@ -12,7 +12,7 @@
           </a:p>
           <a:p>
             <a:r>
-              <a:t>Pricing Exception Matrix. Business area: Pricing. Audience: Internal Operations. Content owner: Richard Talbot. Last reviewed age days: 30. Confidential pricing and fee guidance for exceptions, commission notes, and internal approval.</a:t>
+              <a:t>Pricing Exception Matrix. Business area: Pricing. Audience: Internal Operations. Content owner: Content Owner 02. Author: Sample Author 04. Language: English. Country of origin: United Kingdom. Sentiment: Neutral. Approval status: Approved. Last reviewed age days: 30. Defines fee exception bands, evidence requirements, and approval limits. Teams must document the business rationale before submitting a request.</a:t>
             </a:r>
           </a:p>
         </p:txBody>
